--- a/NuevaData/Presentacion/Profundizacion/FACTOR 12. RECURSOS FÍSICOS Y TECNOLÓGICOS/c. Socialización con la comunidad académica de acciones y avances/Laboratorios Maestría - MIC.pptx
+++ b/NuevaData/Presentacion/Profundizacion/FACTOR 12. RECURSOS FÍSICOS Y TECNOLÓGICOS/c. Socialización con la comunidad académica de acciones y avances/Laboratorios Maestría - MIC.pptx
@@ -7658,7 +7658,7 @@
         </p:nvGraphicFramePr>
         <p:xfrm>
           <a:off x="785362" y="1780000"/>
-          <a:ext cx="8900000" cy="3060000"/>
+          <a:ext cx="8900000" cy="2720000"/>
         </p:xfrm>
         <a:graphic>
           <a:graphicData uri="http://schemas.openxmlformats.org/drawingml/2006/table">
@@ -8506,104 +8506,6 @@
                   </a:tcPr>
                 </a:tc>
               </a:tr>
-              <a:tr h="340000">
-                <a:tc>
-                  <a:txBody>
-                    <a:bodyPr/>
-                    <a:lstStyle/>
-                    <a:p>
-                      <a:pPr algn="l"/>
-                      <a:r>
-                        <a:rPr sz="1400" b="0">
-                          <a:latin typeface="Segoe UI"/>
-                        </a:rPr>
-                        <a:t>Plan anterior sin modalidad (aparte)</a:t>
-                      </a:r>
-                    </a:p>
-                  </a:txBody>
-                  <a:tcPr anchor="ctr" marL="70000" marR="70000"/>
-                </a:tc>
-                <a:tc>
-                  <a:txBody>
-                    <a:bodyPr/>
-                    <a:lstStyle/>
-                    <a:p>
-                      <a:pPr algn="ctr"/>
-                      <a:r>
-                        <a:rPr sz="1400" b="0">
-                          <a:latin typeface="Segoe UI"/>
-                        </a:rPr>
-                        <a:t>51</a:t>
-                      </a:r>
-                    </a:p>
-                  </a:txBody>
-                  <a:tcPr anchor="ctr" marL="70000" marR="70000"/>
-                </a:tc>
-                <a:tc>
-                  <a:txBody>
-                    <a:bodyPr/>
-                    <a:lstStyle/>
-                    <a:p>
-                      <a:pPr algn="ctr"/>
-                      <a:r>
-                        <a:rPr sz="1400" b="0">
-                          <a:latin typeface="Segoe UI"/>
-                        </a:rPr>
-                        <a:t>23</a:t>
-                      </a:r>
-                    </a:p>
-                  </a:txBody>
-                  <a:tcPr anchor="ctr" marL="70000" marR="70000"/>
-                </a:tc>
-                <a:tc>
-                  <a:txBody>
-                    <a:bodyPr/>
-                    <a:lstStyle/>
-                    <a:p>
-                      <a:pPr algn="ctr"/>
-                      <a:r>
-                        <a:rPr sz="1400" b="0">
-                          <a:latin typeface="Segoe UI"/>
-                        </a:rPr>
-                        <a:t>10</a:t>
-                      </a:r>
-                    </a:p>
-                  </a:txBody>
-                  <a:tcPr anchor="ctr" marL="70000" marR="70000"/>
-                </a:tc>
-                <a:tc>
-                  <a:txBody>
-                    <a:bodyPr/>
-                    <a:lstStyle/>
-                    <a:p>
-                      <a:pPr algn="ctr"/>
-                      <a:r>
-                        <a:rPr sz="1400" b="0">
-                          <a:latin typeface="Segoe UI"/>
-                        </a:rPr>
-                        <a:t>3</a:t>
-                      </a:r>
-                    </a:p>
-                  </a:txBody>
-                  <a:tcPr anchor="ctr" marL="70000" marR="70000"/>
-                </a:tc>
-                <a:tc>
-                  <a:txBody>
-                    <a:bodyPr/>
-                    <a:lstStyle/>
-                    <a:p>
-                      <a:pPr algn="ctr"/>
-                      <a:r>
-                        <a:rPr sz="1400" b="0">
-                          <a:latin typeface="Segoe UI"/>
-                        </a:rPr>
-                        <a:t>2</a:t>
-                      </a:r>
-                    </a:p>
-                  </a:txBody>
-                  <a:tcPr anchor="ctr" marL="70000" marR="70000"/>
-                </a:tc>
-              </a:tr>
             </a:tbl>
           </a:graphicData>
         </a:graphic>
@@ -8616,7 +8518,7 @@
         </p:nvSpPr>
         <p:spPr>
           <a:xfrm>
-            <a:off x="785362" y="4890000"/>
+            <a:off x="785362" y="4550000"/>
             <a:ext cx="8900000" cy="420000"/>
           </a:xfrm>
           <a:prstGeom prst="rect">

--- a/NuevaData/Presentacion/Profundizacion/FACTOR 12. RECURSOS FÍSICOS Y TECNOLÓGICOS/c. Socialización con la comunidad académica de acciones y avances/Laboratorios Maestría - MIC.pptx
+++ b/NuevaData/Presentacion/Profundizacion/FACTOR 12. RECURSOS FÍSICOS Y TECNOLÓGICOS/c. Socialización con la comunidad académica de acciones y avances/Laboratorios Maestría - MIC.pptx
@@ -20,7 +20,6 @@
     <p:sldId id="299" r:id="rId11"/>
     <p:sldId id="302" r:id="rId12"/>
     <p:sldId id="304" r:id="rId13"/>
-    <p:sldId id="305" r:id="rId14"/>
   </p:sldIdLst>
   <p:sldSz cx="12192000" cy="6858000"/>
   <p:notesSz cx="6858000" cy="9144000"/>
@@ -7440,1120 +7439,6 @@
 </p:sld>
 </file>
 
-<file path=ppt/slides/slide13.xml><?xml version="1.0" encoding="utf-8"?>
-<p:sld xmlns:a="http://schemas.openxmlformats.org/drawingml/2006/main" xmlns:r="http://schemas.openxmlformats.org/officeDocument/2006/relationships" xmlns:p="http://schemas.openxmlformats.org/presentationml/2006/main">
-  <p:cSld>
-    <p:spTree>
-      <p:nvGrpSpPr>
-        <p:cNvPr id="1" name="">
-          <a:extLst>
-            <a:ext uri="{FF2B5EF4-FFF2-40B4-BE49-F238E27FC236}">
-              <a16:creationId xmlns:a16="http://schemas.microsoft.com/office/drawing/2014/main" id="{5D5ACE55-E515-07F0-7FE1-A5E1EA400F99}"/>
-            </a:ext>
-          </a:extLst>
-        </p:cNvPr>
-        <p:cNvGrpSpPr/>
-        <p:nvPr/>
-      </p:nvGrpSpPr>
-      <p:grpSpPr>
-        <a:xfrm>
-          <a:off x="0" y="0"/>
-          <a:ext cx="0" cy="0"/>
-          <a:chOff x="0" y="0"/>
-          <a:chExt cx="0" cy="0"/>
-        </a:xfrm>
-      </p:grpSpPr>
-      <p:pic>
-        <p:nvPicPr>
-          <p:cNvPr id="7" name="Imagen 6" descr="Texto, Carta&#10;&#10;El contenido generado por IA puede ser incorrecto.">
-            <a:extLst>
-              <a:ext uri="{FF2B5EF4-FFF2-40B4-BE49-F238E27FC236}">
-                <a16:creationId xmlns:a16="http://schemas.microsoft.com/office/drawing/2014/main" id="{2C82D979-69BD-00C4-7031-926F8FFC4558}"/>
-              </a:ext>
-            </a:extLst>
-          </p:cNvPr>
-          <p:cNvPicPr>
-            <a:picLocks noChangeAspect="1"/>
-          </p:cNvPicPr>
-          <p:nvPr/>
-        </p:nvPicPr>
-        <p:blipFill>
-          <a:blip r:embed="rId2">
-            <a:alphaModFix amt="43000"/>
-          </a:blip>
-          <a:stretch>
-            <a:fillRect/>
-          </a:stretch>
-        </p:blipFill>
-        <p:spPr>
-          <a:xfrm>
-            <a:off x="8464671" y="5359161"/>
-            <a:ext cx="2940528" cy="1283719"/>
-          </a:xfrm>
-          <a:prstGeom prst="rect">
-            <a:avLst/>
-          </a:prstGeom>
-        </p:spPr>
-      </p:pic>
-      <p:pic>
-        <p:nvPicPr>
-          <p:cNvPr id="8" name="Imagen 7" descr="Francisco Jose De Caldas Ingeniería">
-            <a:extLst>
-              <a:ext uri="{FF2B5EF4-FFF2-40B4-BE49-F238E27FC236}">
-                <a16:creationId xmlns:a16="http://schemas.microsoft.com/office/drawing/2014/main" id="{EB85D378-946A-2353-9F9E-A1C8D0219C41}"/>
-              </a:ext>
-            </a:extLst>
-          </p:cNvPr>
-          <p:cNvPicPr>
-            <a:picLocks noChangeAspect="1"/>
-          </p:cNvPicPr>
-          <p:nvPr/>
-        </p:nvPicPr>
-        <p:blipFill>
-          <a:blip r:embed="rId3">
-            <a:alphaModFix amt="30000"/>
-          </a:blip>
-          <a:stretch>
-            <a:fillRect/>
-          </a:stretch>
-        </p:blipFill>
-        <p:spPr>
-          <a:xfrm>
-            <a:off x="9887130" y="484337"/>
-            <a:ext cx="1518967" cy="1600558"/>
-          </a:xfrm>
-          <a:prstGeom prst="rect">
-            <a:avLst/>
-          </a:prstGeom>
-        </p:spPr>
-      </p:pic>
-      <p:pic>
-        <p:nvPicPr>
-          <p:cNvPr id="9" name="Imagen 8" descr="Imagen que contiene botella, firmar, naranja, parada&#10;&#10;El contenido generado por inteligencia artificial puede ser incorrecto.">
-            <a:extLst>
-              <a:ext uri="{FF2B5EF4-FFF2-40B4-BE49-F238E27FC236}">
-                <a16:creationId xmlns:a16="http://schemas.microsoft.com/office/drawing/2014/main" id="{A345DA37-80DA-60A7-2EB4-D84F194F1EC2}"/>
-              </a:ext>
-            </a:extLst>
-          </p:cNvPr>
-          <p:cNvPicPr>
-            <a:picLocks noChangeAspect="1"/>
-          </p:cNvPicPr>
-          <p:nvPr/>
-        </p:nvPicPr>
-        <p:blipFill>
-          <a:blip r:embed="rId4">
-            <a:alphaModFix amt="22000"/>
-          </a:blip>
-          <a:srcRect r="9662" b="1667"/>
-          <a:stretch>
-            <a:fillRect/>
-          </a:stretch>
-        </p:blipFill>
-        <p:spPr>
-          <a:xfrm>
-            <a:off x="785362" y="5486761"/>
-            <a:ext cx="3627803" cy="1159264"/>
-          </a:xfrm>
-          <a:prstGeom prst="rect">
-            <a:avLst/>
-          </a:prstGeom>
-        </p:spPr>
-      </p:pic>
-      <p:sp>
-        <p:nvSpPr>
-          <p:cNvPr id="22" name="Título 1">
-            <a:extLst>
-              <a:ext uri="{FF2B5EF4-FFF2-40B4-BE49-F238E27FC236}">
-                <a16:creationId xmlns:a16="http://schemas.microsoft.com/office/drawing/2014/main" id="{467CED5E-CCF6-DC72-069C-4341D6AAEB75}"/>
-              </a:ext>
-            </a:extLst>
-          </p:cNvPr>
-          <p:cNvSpPr>
-            <a:spLocks noGrp="1"/>
-          </p:cNvSpPr>
-          <p:nvPr/>
-        </p:nvSpPr>
-        <p:spPr>
-          <a:xfrm>
-            <a:off x="783293" y="471388"/>
-            <a:ext cx="7128670" cy="815723"/>
-          </a:xfrm>
-          <a:prstGeom prst="rect">
-            <a:avLst/>
-          </a:prstGeom>
-        </p:spPr>
-        <p:txBody>
-          <a:bodyPr vert="horz" lIns="91440" tIns="45720" rIns="91440" bIns="45720" rtlCol="0" anchor="ctr">
-            <a:noAutofit/>
-          </a:bodyPr>
-          <a:lstStyle>
-            <a:lvl1pPr algn="l" defTabSz="514338" rtl="0" eaLnBrk="1" latinLnBrk="0" hangingPunct="1">
-              <a:lnSpc>
-                <a:spcPct val="90000"/>
-              </a:lnSpc>
-              <a:spcBef>
-                <a:spcPct val="0"/>
-              </a:spcBef>
-              <a:buNone/>
-              <a:defRPr sz="2025" b="1" kern="1200">
-                <a:solidFill>
-                  <a:schemeClr val="tx1"/>
-                </a:solidFill>
-                <a:latin typeface="+mj-lt"/>
-                <a:ea typeface="+mj-ea"/>
-                <a:cs typeface="+mj-cs"/>
-              </a:defRPr>
-            </a:lvl1pPr>
-          </a:lstStyle>
-          <a:p>
-            <a:r>
-              <a:rPr lang="es-CO" sz="4000">
-                <a:latin typeface="Segoe UI"/>
-                <a:cs typeface="Segoe UI"/>
-              </a:rPr>
-              <a:t> Estudiantes Impactados </a:t>
-            </a:r>
-          </a:p>
-        </p:txBody>
-      </p:sp>
-      <p:sp>
-        <p:nvSpPr>
-          <p:cNvPr id="23" name="Estudiantes activos - subtítulo"/>
-          <p:cNvSpPr txBox="1"/>
-          <p:nvPr/>
-        </p:nvSpPr>
-        <p:spPr>
-          <a:xfrm>
-            <a:off x="783293" y="1300000"/>
-            <a:ext cx="8900000" cy="420000"/>
-          </a:xfrm>
-          <a:prstGeom prst="rect">
-            <a:avLst/>
-          </a:prstGeom>
-          <a:noFill/>
-        </p:spPr>
-        <p:txBody>
-          <a:bodyPr wrap="none">
-            <a:spAutoFit/>
-          </a:bodyPr>
-          <a:lstStyle/>
-          <a:p>
-            <a:r>
-              <a:rPr sz="1800" b="1">
-                <a:latin typeface="Segoe UI"/>
-              </a:rPr>
-              <a:t>Estudiantes activos por énfasis, 2022 a 2026 — modalidad Profundización</a:t>
-            </a:r>
-          </a:p>
-        </p:txBody>
-      </p:sp>
-      <p:graphicFrame>
-        <p:nvGraphicFramePr>
-          <p:cNvPr id="24" name="Estudiantes activos - tabla"/>
-          <p:cNvGraphicFramePr>
-            <a:graphicFrameLocks noGrp="1"/>
-          </p:cNvGraphicFramePr>
-          <p:nvPr/>
-        </p:nvGraphicFramePr>
-        <p:xfrm>
-          <a:off x="785362" y="1780000"/>
-          <a:ext cx="8900000" cy="2720000"/>
-        </p:xfrm>
-        <a:graphic>
-          <a:graphicData uri="http://schemas.openxmlformats.org/drawingml/2006/table">
-            <a:tbl>
-              <a:tblPr firstRow="1" bandRow="1">
-                <a:tableStyleId>{5940675A-B579-460E-94D1-54222C63F5DA}</a:tableStyleId>
-              </a:tblPr>
-              <a:tblGrid>
-                <a:gridCol w="3900000"/>
-                <a:gridCol w="1000000"/>
-                <a:gridCol w="1000000"/>
-                <a:gridCol w="1000000"/>
-                <a:gridCol w="1000000"/>
-                <a:gridCol w="1000000"/>
-              </a:tblGrid>
-              <a:tr h="340000">
-                <a:tc>
-                  <a:txBody>
-                    <a:bodyPr/>
-                    <a:lstStyle/>
-                    <a:p>
-                      <a:pPr algn="l"/>
-                      <a:r>
-                        <a:rPr sz="1400" b="1">
-                          <a:latin typeface="Segoe UI"/>
-                        </a:rPr>
-                        <a:t>Énfasis</a:t>
-                      </a:r>
-                    </a:p>
-                  </a:txBody>
-                  <a:tcPr anchor="ctr" marL="70000" marR="70000">
-                    <a:solidFill>
-                      <a:srgbClr val="DCE6F1"/>
-                    </a:solidFill>
-                  </a:tcPr>
-                </a:tc>
-                <a:tc>
-                  <a:txBody>
-                    <a:bodyPr/>
-                    <a:lstStyle/>
-                    <a:p>
-                      <a:pPr algn="ctr"/>
-                      <a:r>
-                        <a:rPr sz="1400" b="1">
-                          <a:latin typeface="Segoe UI"/>
-                        </a:rPr>
-                        <a:t>2022</a:t>
-                      </a:r>
-                    </a:p>
-                  </a:txBody>
-                  <a:tcPr anchor="ctr" marL="70000" marR="70000">
-                    <a:solidFill>
-                      <a:srgbClr val="DCE6F1"/>
-                    </a:solidFill>
-                  </a:tcPr>
-                </a:tc>
-                <a:tc>
-                  <a:txBody>
-                    <a:bodyPr/>
-                    <a:lstStyle/>
-                    <a:p>
-                      <a:pPr algn="ctr"/>
-                      <a:r>
-                        <a:rPr sz="1400" b="1">
-                          <a:latin typeface="Segoe UI"/>
-                        </a:rPr>
-                        <a:t>2023</a:t>
-                      </a:r>
-                    </a:p>
-                  </a:txBody>
-                  <a:tcPr anchor="ctr" marL="70000" marR="70000">
-                    <a:solidFill>
-                      <a:srgbClr val="DCE6F1"/>
-                    </a:solidFill>
-                  </a:tcPr>
-                </a:tc>
-                <a:tc>
-                  <a:txBody>
-                    <a:bodyPr/>
-                    <a:lstStyle/>
-                    <a:p>
-                      <a:pPr algn="ctr"/>
-                      <a:r>
-                        <a:rPr sz="1400" b="1">
-                          <a:latin typeface="Segoe UI"/>
-                        </a:rPr>
-                        <a:t>2024</a:t>
-                      </a:r>
-                    </a:p>
-                  </a:txBody>
-                  <a:tcPr anchor="ctr" marL="70000" marR="70000">
-                    <a:solidFill>
-                      <a:srgbClr val="DCE6F1"/>
-                    </a:solidFill>
-                  </a:tcPr>
-                </a:tc>
-                <a:tc>
-                  <a:txBody>
-                    <a:bodyPr/>
-                    <a:lstStyle/>
-                    <a:p>
-                      <a:pPr algn="ctr"/>
-                      <a:r>
-                        <a:rPr sz="1400" b="1">
-                          <a:latin typeface="Segoe UI"/>
-                        </a:rPr>
-                        <a:t>2025</a:t>
-                      </a:r>
-                    </a:p>
-                  </a:txBody>
-                  <a:tcPr anchor="ctr" marL="70000" marR="70000">
-                    <a:solidFill>
-                      <a:srgbClr val="DCE6F1"/>
-                    </a:solidFill>
-                  </a:tcPr>
-                </a:tc>
-                <a:tc>
-                  <a:txBody>
-                    <a:bodyPr/>
-                    <a:lstStyle/>
-                    <a:p>
-                      <a:pPr algn="ctr"/>
-                      <a:r>
-                        <a:rPr sz="1400" b="1">
-                          <a:latin typeface="Segoe UI"/>
-                        </a:rPr>
-                        <a:t>2026</a:t>
-                      </a:r>
-                    </a:p>
-                  </a:txBody>
-                  <a:tcPr anchor="ctr" marL="70000" marR="70000">
-                    <a:solidFill>
-                      <a:srgbClr val="DCE6F1"/>
-                    </a:solidFill>
-                  </a:tcPr>
-                </a:tc>
-              </a:tr>
-              <a:tr h="340000">
-                <a:tc>
-                  <a:txBody>
-                    <a:bodyPr/>
-                    <a:lstStyle/>
-                    <a:p>
-                      <a:pPr algn="l"/>
-                      <a:r>
-                        <a:rPr sz="1400" b="0">
-                          <a:latin typeface="Segoe UI"/>
-                        </a:rPr>
-                        <a:t>Teleinformática</a:t>
-                      </a:r>
-                    </a:p>
-                  </a:txBody>
-                  <a:tcPr anchor="ctr" marL="70000" marR="70000"/>
-                </a:tc>
-                <a:tc>
-                  <a:txBody>
-                    <a:bodyPr/>
-                    <a:lstStyle/>
-                    <a:p>
-                      <a:pPr algn="ctr"/>
-                      <a:r>
-                        <a:rPr sz="1400" b="0">
-                          <a:latin typeface="Segoe UI"/>
-                        </a:rPr>
-                        <a:t>23</a:t>
-                      </a:r>
-                    </a:p>
-                  </a:txBody>
-                  <a:tcPr anchor="ctr" marL="70000" marR="70000"/>
-                </a:tc>
-                <a:tc>
-                  <a:txBody>
-                    <a:bodyPr/>
-                    <a:lstStyle/>
-                    <a:p>
-                      <a:pPr algn="ctr"/>
-                      <a:r>
-                        <a:rPr sz="1400" b="0">
-                          <a:latin typeface="Segoe UI"/>
-                        </a:rPr>
-                        <a:t>16</a:t>
-                      </a:r>
-                    </a:p>
-                  </a:txBody>
-                  <a:tcPr anchor="ctr" marL="70000" marR="70000"/>
-                </a:tc>
-                <a:tc>
-                  <a:txBody>
-                    <a:bodyPr/>
-                    <a:lstStyle/>
-                    <a:p>
-                      <a:pPr algn="ctr"/>
-                      <a:r>
-                        <a:rPr sz="1400" b="0">
-                          <a:latin typeface="Segoe UI"/>
-                        </a:rPr>
-                        <a:t>16</a:t>
-                      </a:r>
-                    </a:p>
-                  </a:txBody>
-                  <a:tcPr anchor="ctr" marL="70000" marR="70000"/>
-                </a:tc>
-                <a:tc>
-                  <a:txBody>
-                    <a:bodyPr/>
-                    <a:lstStyle/>
-                    <a:p>
-                      <a:pPr algn="ctr"/>
-                      <a:r>
-                        <a:rPr sz="1400" b="0">
-                          <a:latin typeface="Segoe UI"/>
-                        </a:rPr>
-                        <a:t>14</a:t>
-                      </a:r>
-                    </a:p>
-                  </a:txBody>
-                  <a:tcPr anchor="ctr" marL="70000" marR="70000"/>
-                </a:tc>
-                <a:tc>
-                  <a:txBody>
-                    <a:bodyPr/>
-                    <a:lstStyle/>
-                    <a:p>
-                      <a:pPr algn="ctr"/>
-                      <a:r>
-                        <a:rPr sz="1400" b="0">
-                          <a:latin typeface="Segoe UI"/>
-                        </a:rPr>
-                        <a:t>11</a:t>
-                      </a:r>
-                    </a:p>
-                  </a:txBody>
-                  <a:tcPr anchor="ctr" marL="70000" marR="70000"/>
-                </a:tc>
-              </a:tr>
-              <a:tr h="340000">
-                <a:tc>
-                  <a:txBody>
-                    <a:bodyPr/>
-                    <a:lstStyle/>
-                    <a:p>
-                      <a:pPr algn="l"/>
-                      <a:r>
-                        <a:rPr sz="1400" b="0">
-                          <a:latin typeface="Segoe UI"/>
-                        </a:rPr>
-                        <a:t>Sistemas de Información</a:t>
-                      </a:r>
-                    </a:p>
-                  </a:txBody>
-                  <a:tcPr anchor="ctr" marL="70000" marR="70000"/>
-                </a:tc>
-                <a:tc>
-                  <a:txBody>
-                    <a:bodyPr/>
-                    <a:lstStyle/>
-                    <a:p>
-                      <a:pPr algn="ctr"/>
-                      <a:r>
-                        <a:rPr sz="1400" b="0">
-                          <a:latin typeface="Segoe UI"/>
-                        </a:rPr>
-                        <a:t>5</a:t>
-                      </a:r>
-                    </a:p>
-                  </a:txBody>
-                  <a:tcPr anchor="ctr" marL="70000" marR="70000"/>
-                </a:tc>
-                <a:tc>
-                  <a:txBody>
-                    <a:bodyPr/>
-                    <a:lstStyle/>
-                    <a:p>
-                      <a:pPr algn="ctr"/>
-                      <a:r>
-                        <a:rPr sz="1400" b="0">
-                          <a:latin typeface="Segoe UI"/>
-                        </a:rPr>
-                        <a:t>4</a:t>
-                      </a:r>
-                    </a:p>
-                  </a:txBody>
-                  <a:tcPr anchor="ctr" marL="70000" marR="70000"/>
-                </a:tc>
-                <a:tc>
-                  <a:txBody>
-                    <a:bodyPr/>
-                    <a:lstStyle/>
-                    <a:p>
-                      <a:pPr algn="ctr"/>
-                      <a:r>
-                        <a:rPr sz="1400" b="0">
-                          <a:latin typeface="Segoe UI"/>
-                        </a:rPr>
-                        <a:t>2</a:t>
-                      </a:r>
-                    </a:p>
-                  </a:txBody>
-                  <a:tcPr anchor="ctr" marL="70000" marR="70000"/>
-                </a:tc>
-                <a:tc>
-                  <a:txBody>
-                    <a:bodyPr/>
-                    <a:lstStyle/>
-                    <a:p>
-                      <a:pPr algn="ctr"/>
-                      <a:r>
-                        <a:rPr sz="1400" b="0">
-                          <a:latin typeface="Segoe UI"/>
-                        </a:rPr>
-                        <a:t>2</a:t>
-                      </a:r>
-                    </a:p>
-                  </a:txBody>
-                  <a:tcPr anchor="ctr" marL="70000" marR="70000"/>
-                </a:tc>
-                <a:tc>
-                  <a:txBody>
-                    <a:bodyPr/>
-                    <a:lstStyle/>
-                    <a:p>
-                      <a:pPr algn="ctr"/>
-                      <a:r>
-                        <a:rPr sz="1400" b="0">
-                          <a:latin typeface="Segoe UI"/>
-                        </a:rPr>
-                        <a:t>2</a:t>
-                      </a:r>
-                    </a:p>
-                  </a:txBody>
-                  <a:tcPr anchor="ctr" marL="70000" marR="70000"/>
-                </a:tc>
-              </a:tr>
-              <a:tr h="340000">
-                <a:tc>
-                  <a:txBody>
-                    <a:bodyPr/>
-                    <a:lstStyle/>
-                    <a:p>
-                      <a:pPr algn="l"/>
-                      <a:r>
-                        <a:rPr sz="1400" b="0">
-                          <a:latin typeface="Segoe UI"/>
-                        </a:rPr>
-                        <a:t>Geomática</a:t>
-                      </a:r>
-                    </a:p>
-                  </a:txBody>
-                  <a:tcPr anchor="ctr" marL="70000" marR="70000"/>
-                </a:tc>
-                <a:tc>
-                  <a:txBody>
-                    <a:bodyPr/>
-                    <a:lstStyle/>
-                    <a:p>
-                      <a:pPr algn="ctr"/>
-                      <a:r>
-                        <a:rPr sz="1400" b="0">
-                          <a:latin typeface="Segoe UI"/>
-                        </a:rPr>
-                        <a:t>27</a:t>
-                      </a:r>
-                    </a:p>
-                  </a:txBody>
-                  <a:tcPr anchor="ctr" marL="70000" marR="70000"/>
-                </a:tc>
-                <a:tc>
-                  <a:txBody>
-                    <a:bodyPr/>
-                    <a:lstStyle/>
-                    <a:p>
-                      <a:pPr algn="ctr"/>
-                      <a:r>
-                        <a:rPr sz="1400" b="0">
-                          <a:latin typeface="Segoe UI"/>
-                        </a:rPr>
-                        <a:t>24</a:t>
-                      </a:r>
-                    </a:p>
-                  </a:txBody>
-                  <a:tcPr anchor="ctr" marL="70000" marR="70000"/>
-                </a:tc>
-                <a:tc>
-                  <a:txBody>
-                    <a:bodyPr/>
-                    <a:lstStyle/>
-                    <a:p>
-                      <a:pPr algn="ctr"/>
-                      <a:r>
-                        <a:rPr sz="1400" b="0">
-                          <a:latin typeface="Segoe UI"/>
-                        </a:rPr>
-                        <a:t>30</a:t>
-                      </a:r>
-                    </a:p>
-                  </a:txBody>
-                  <a:tcPr anchor="ctr" marL="70000" marR="70000"/>
-                </a:tc>
-                <a:tc>
-                  <a:txBody>
-                    <a:bodyPr/>
-                    <a:lstStyle/>
-                    <a:p>
-                      <a:pPr algn="ctr"/>
-                      <a:r>
-                        <a:rPr sz="1400" b="0">
-                          <a:latin typeface="Segoe UI"/>
-                        </a:rPr>
-                        <a:t>33</a:t>
-                      </a:r>
-                    </a:p>
-                  </a:txBody>
-                  <a:tcPr anchor="ctr" marL="70000" marR="70000"/>
-                </a:tc>
-                <a:tc>
-                  <a:txBody>
-                    <a:bodyPr/>
-                    <a:lstStyle/>
-                    <a:p>
-                      <a:pPr algn="ctr"/>
-                      <a:r>
-                        <a:rPr sz="1400" b="0">
-                          <a:latin typeface="Segoe UI"/>
-                        </a:rPr>
-                        <a:t>31</a:t>
-                      </a:r>
-                    </a:p>
-                  </a:txBody>
-                  <a:tcPr anchor="ctr" marL="70000" marR="70000"/>
-                </a:tc>
-              </a:tr>
-              <a:tr h="340000">
-                <a:tc>
-                  <a:txBody>
-                    <a:bodyPr/>
-                    <a:lstStyle/>
-                    <a:p>
-                      <a:pPr algn="l"/>
-                      <a:r>
-                        <a:rPr sz="1400" b="0">
-                          <a:latin typeface="Segoe UI"/>
-                        </a:rPr>
-                        <a:t>Ingeniería de Software</a:t>
-                      </a:r>
-                    </a:p>
-                  </a:txBody>
-                  <a:tcPr anchor="ctr" marL="70000" marR="70000"/>
-                </a:tc>
-                <a:tc>
-                  <a:txBody>
-                    <a:bodyPr/>
-                    <a:lstStyle/>
-                    <a:p>
-                      <a:pPr algn="ctr"/>
-                      <a:r>
-                        <a:rPr sz="1400" b="0">
-                          <a:latin typeface="Segoe UI"/>
-                        </a:rPr>
-                        <a:t>47</a:t>
-                      </a:r>
-                    </a:p>
-                  </a:txBody>
-                  <a:tcPr anchor="ctr" marL="70000" marR="70000"/>
-                </a:tc>
-                <a:tc>
-                  <a:txBody>
-                    <a:bodyPr/>
-                    <a:lstStyle/>
-                    <a:p>
-                      <a:pPr algn="ctr"/>
-                      <a:r>
-                        <a:rPr sz="1400" b="0">
-                          <a:latin typeface="Segoe UI"/>
-                        </a:rPr>
-                        <a:t>45</a:t>
-                      </a:r>
-                    </a:p>
-                  </a:txBody>
-                  <a:tcPr anchor="ctr" marL="70000" marR="70000"/>
-                </a:tc>
-                <a:tc>
-                  <a:txBody>
-                    <a:bodyPr/>
-                    <a:lstStyle/>
-                    <a:p>
-                      <a:pPr algn="ctr"/>
-                      <a:r>
-                        <a:rPr sz="1400" b="0">
-                          <a:latin typeface="Segoe UI"/>
-                        </a:rPr>
-                        <a:t>38</a:t>
-                      </a:r>
-                    </a:p>
-                  </a:txBody>
-                  <a:tcPr anchor="ctr" marL="70000" marR="70000"/>
-                </a:tc>
-                <a:tc>
-                  <a:txBody>
-                    <a:bodyPr/>
-                    <a:lstStyle/>
-                    <a:p>
-                      <a:pPr algn="ctr"/>
-                      <a:r>
-                        <a:rPr sz="1400" b="0">
-                          <a:latin typeface="Segoe UI"/>
-                        </a:rPr>
-                        <a:t>36</a:t>
-                      </a:r>
-                    </a:p>
-                  </a:txBody>
-                  <a:tcPr anchor="ctr" marL="70000" marR="70000"/>
-                </a:tc>
-                <a:tc>
-                  <a:txBody>
-                    <a:bodyPr/>
-                    <a:lstStyle/>
-                    <a:p>
-                      <a:pPr algn="ctr"/>
-                      <a:r>
-                        <a:rPr sz="1400" b="0">
-                          <a:latin typeface="Segoe UI"/>
-                        </a:rPr>
-                        <a:t>26</a:t>
-                      </a:r>
-                    </a:p>
-                  </a:txBody>
-                  <a:tcPr anchor="ctr" marL="70000" marR="70000"/>
-                </a:tc>
-              </a:tr>
-              <a:tr h="340000">
-                <a:tc>
-                  <a:txBody>
-                    <a:bodyPr/>
-                    <a:lstStyle/>
-                    <a:p>
-                      <a:pPr algn="l"/>
-                      <a:r>
-                        <a:rPr sz="1400" b="0">
-                          <a:latin typeface="Segoe UI"/>
-                        </a:rPr>
-                        <a:t>Inteligencia Artificial</a:t>
-                      </a:r>
-                    </a:p>
-                  </a:txBody>
-                  <a:tcPr anchor="ctr" marL="70000" marR="70000"/>
-                </a:tc>
-                <a:tc>
-                  <a:txBody>
-                    <a:bodyPr/>
-                    <a:lstStyle/>
-                    <a:p>
-                      <a:pPr algn="ctr"/>
-                      <a:r>
-                        <a:rPr sz="1400" b="0">
-                          <a:latin typeface="Segoe UI"/>
-                        </a:rPr>
-                        <a:t>0</a:t>
-                      </a:r>
-                    </a:p>
-                  </a:txBody>
-                  <a:tcPr anchor="ctr" marL="70000" marR="70000"/>
-                </a:tc>
-                <a:tc>
-                  <a:txBody>
-                    <a:bodyPr/>
-                    <a:lstStyle/>
-                    <a:p>
-                      <a:pPr algn="ctr"/>
-                      <a:r>
-                        <a:rPr sz="1400" b="0">
-                          <a:latin typeface="Segoe UI"/>
-                        </a:rPr>
-                        <a:t>0</a:t>
-                      </a:r>
-                    </a:p>
-                  </a:txBody>
-                  <a:tcPr anchor="ctr" marL="70000" marR="70000"/>
-                </a:tc>
-                <a:tc>
-                  <a:txBody>
-                    <a:bodyPr/>
-                    <a:lstStyle/>
-                    <a:p>
-                      <a:pPr algn="ctr"/>
-                      <a:r>
-                        <a:rPr sz="1400" b="0">
-                          <a:latin typeface="Segoe UI"/>
-                        </a:rPr>
-                        <a:t>1</a:t>
-                      </a:r>
-                    </a:p>
-                  </a:txBody>
-                  <a:tcPr anchor="ctr" marL="70000" marR="70000"/>
-                </a:tc>
-                <a:tc>
-                  <a:txBody>
-                    <a:bodyPr/>
-                    <a:lstStyle/>
-                    <a:p>
-                      <a:pPr algn="ctr"/>
-                      <a:r>
-                        <a:rPr sz="1400" b="0">
-                          <a:latin typeface="Segoe UI"/>
-                        </a:rPr>
-                        <a:t>9</a:t>
-                      </a:r>
-                    </a:p>
-                  </a:txBody>
-                  <a:tcPr anchor="ctr" marL="70000" marR="70000"/>
-                </a:tc>
-                <a:tc>
-                  <a:txBody>
-                    <a:bodyPr/>
-                    <a:lstStyle/>
-                    <a:p>
-                      <a:pPr algn="ctr"/>
-                      <a:r>
-                        <a:rPr sz="1400" b="0">
-                          <a:latin typeface="Segoe UI"/>
-                        </a:rPr>
-                        <a:t>12</a:t>
-                      </a:r>
-                    </a:p>
-                  </a:txBody>
-                  <a:tcPr anchor="ctr" marL="70000" marR="70000"/>
-                </a:tc>
-              </a:tr>
-              <a:tr h="340000">
-                <a:tc>
-                  <a:txBody>
-                    <a:bodyPr/>
-                    <a:lstStyle/>
-                    <a:p>
-                      <a:pPr algn="l"/>
-                      <a:r>
-                        <a:rPr sz="1400" b="0">
-                          <a:latin typeface="Segoe UI"/>
-                        </a:rPr>
-                        <a:t>Sin énfasis definido aún</a:t>
-                      </a:r>
-                    </a:p>
-                  </a:txBody>
-                  <a:tcPr anchor="ctr" marL="70000" marR="70000"/>
-                </a:tc>
-                <a:tc>
-                  <a:txBody>
-                    <a:bodyPr/>
-                    <a:lstStyle/>
-                    <a:p>
-                      <a:pPr algn="ctr"/>
-                      <a:r>
-                        <a:rPr sz="1400" b="0">
-                          <a:latin typeface="Segoe UI"/>
-                        </a:rPr>
-                        <a:t>0</a:t>
-                      </a:r>
-                    </a:p>
-                  </a:txBody>
-                  <a:tcPr anchor="ctr" marL="70000" marR="70000"/>
-                </a:tc>
-                <a:tc>
-                  <a:txBody>
-                    <a:bodyPr/>
-                    <a:lstStyle/>
-                    <a:p>
-                      <a:pPr algn="ctr"/>
-                      <a:r>
-                        <a:rPr sz="1400" b="0">
-                          <a:latin typeface="Segoe UI"/>
-                        </a:rPr>
-                        <a:t>0</a:t>
-                      </a:r>
-                    </a:p>
-                  </a:txBody>
-                  <a:tcPr anchor="ctr" marL="70000" marR="70000"/>
-                </a:tc>
-                <a:tc>
-                  <a:txBody>
-                    <a:bodyPr/>
-                    <a:lstStyle/>
-                    <a:p>
-                      <a:pPr algn="ctr"/>
-                      <a:r>
-                        <a:rPr sz="1400" b="0">
-                          <a:latin typeface="Segoe UI"/>
-                        </a:rPr>
-                        <a:t>1</a:t>
-                      </a:r>
-                    </a:p>
-                  </a:txBody>
-                  <a:tcPr anchor="ctr" marL="70000" marR="70000"/>
-                </a:tc>
-                <a:tc>
-                  <a:txBody>
-                    <a:bodyPr/>
-                    <a:lstStyle/>
-                    <a:p>
-                      <a:pPr algn="ctr"/>
-                      <a:r>
-                        <a:rPr sz="1400" b="0">
-                          <a:latin typeface="Segoe UI"/>
-                        </a:rPr>
-                        <a:t>1</a:t>
-                      </a:r>
-                    </a:p>
-                  </a:txBody>
-                  <a:tcPr anchor="ctr" marL="70000" marR="70000"/>
-                </a:tc>
-                <a:tc>
-                  <a:txBody>
-                    <a:bodyPr/>
-                    <a:lstStyle/>
-                    <a:p>
-                      <a:pPr algn="ctr"/>
-                      <a:r>
-                        <a:rPr sz="1400" b="0">
-                          <a:latin typeface="Segoe UI"/>
-                        </a:rPr>
-                        <a:t>10</a:t>
-                      </a:r>
-                    </a:p>
-                  </a:txBody>
-                  <a:tcPr anchor="ctr" marL="70000" marR="70000"/>
-                </a:tc>
-              </a:tr>
-              <a:tr h="340000">
-                <a:tc>
-                  <a:txBody>
-                    <a:bodyPr/>
-                    <a:lstStyle/>
-                    <a:p>
-                      <a:pPr algn="l"/>
-                      <a:r>
-                        <a:rPr sz="1400" b="1">
-                          <a:latin typeface="Segoe UI"/>
-                        </a:rPr>
-                        <a:t>Total Profundización</a:t>
-                      </a:r>
-                    </a:p>
-                  </a:txBody>
-                  <a:tcPr anchor="ctr" marL="70000" marR="70000">
-                    <a:solidFill>
-                      <a:srgbClr val="DCE6F1"/>
-                    </a:solidFill>
-                  </a:tcPr>
-                </a:tc>
-                <a:tc>
-                  <a:txBody>
-                    <a:bodyPr/>
-                    <a:lstStyle/>
-                    <a:p>
-                      <a:pPr algn="ctr"/>
-                      <a:r>
-                        <a:rPr sz="1400" b="1">
-                          <a:latin typeface="Segoe UI"/>
-                        </a:rPr>
-                        <a:t>102</a:t>
-                      </a:r>
-                    </a:p>
-                  </a:txBody>
-                  <a:tcPr anchor="ctr" marL="70000" marR="70000">
-                    <a:solidFill>
-                      <a:srgbClr val="DCE6F1"/>
-                    </a:solidFill>
-                  </a:tcPr>
-                </a:tc>
-                <a:tc>
-                  <a:txBody>
-                    <a:bodyPr/>
-                    <a:lstStyle/>
-                    <a:p>
-                      <a:pPr algn="ctr"/>
-                      <a:r>
-                        <a:rPr sz="1400" b="1">
-                          <a:latin typeface="Segoe UI"/>
-                        </a:rPr>
-                        <a:t>89</a:t>
-                      </a:r>
-                    </a:p>
-                  </a:txBody>
-                  <a:tcPr anchor="ctr" marL="70000" marR="70000">
-                    <a:solidFill>
-                      <a:srgbClr val="DCE6F1"/>
-                    </a:solidFill>
-                  </a:tcPr>
-                </a:tc>
-                <a:tc>
-                  <a:txBody>
-                    <a:bodyPr/>
-                    <a:lstStyle/>
-                    <a:p>
-                      <a:pPr algn="ctr"/>
-                      <a:r>
-                        <a:rPr sz="1400" b="1">
-                          <a:latin typeface="Segoe UI"/>
-                        </a:rPr>
-                        <a:t>88</a:t>
-                      </a:r>
-                    </a:p>
-                  </a:txBody>
-                  <a:tcPr anchor="ctr" marL="70000" marR="70000">
-                    <a:solidFill>
-                      <a:srgbClr val="DCE6F1"/>
-                    </a:solidFill>
-                  </a:tcPr>
-                </a:tc>
-                <a:tc>
-                  <a:txBody>
-                    <a:bodyPr/>
-                    <a:lstStyle/>
-                    <a:p>
-                      <a:pPr algn="ctr"/>
-                      <a:r>
-                        <a:rPr sz="1400" b="1">
-                          <a:latin typeface="Segoe UI"/>
-                        </a:rPr>
-                        <a:t>95</a:t>
-                      </a:r>
-                    </a:p>
-                  </a:txBody>
-                  <a:tcPr anchor="ctr" marL="70000" marR="70000">
-                    <a:solidFill>
-                      <a:srgbClr val="DCE6F1"/>
-                    </a:solidFill>
-                  </a:tcPr>
-                </a:tc>
-                <a:tc>
-                  <a:txBody>
-                    <a:bodyPr/>
-                    <a:lstStyle/>
-                    <a:p>
-                      <a:pPr algn="ctr"/>
-                      <a:r>
-                        <a:rPr sz="1400" b="1">
-                          <a:latin typeface="Segoe UI"/>
-                        </a:rPr>
-                        <a:t>92</a:t>
-                      </a:r>
-                    </a:p>
-                  </a:txBody>
-                  <a:tcPr anchor="ctr" marL="70000" marR="70000">
-                    <a:solidFill>
-                      <a:srgbClr val="DCE6F1"/>
-                    </a:solidFill>
-                  </a:tcPr>
-                </a:tc>
-              </a:tr>
-            </a:tbl>
-          </a:graphicData>
-        </a:graphic>
-      </p:graphicFrame>
-      <p:sp>
-        <p:nvSpPr>
-          <p:cNvPr id="25" name="Estudiantes activos - nota"/>
-          <p:cNvSpPr txBox="1"/>
-          <p:nvPr/>
-        </p:nvSpPr>
-        <p:spPr>
-          <a:xfrm>
-            <a:off x="785362" y="4550000"/>
-            <a:ext cx="8900000" cy="420000"/>
-          </a:xfrm>
-          <a:prstGeom prst="rect">
-            <a:avLst/>
-          </a:prstGeom>
-          <a:noFill/>
-        </p:spPr>
-        <p:txBody>
-          <a:bodyPr wrap="square">
-            <a:spAutoFit/>
-          </a:bodyPr>
-          <a:lstStyle/>
-          <a:p>
-            <a:r>
-              <a:rPr sz="900" i="1">
-                <a:latin typeface="Segoe UI"/>
-              </a:rPr>
-              <a:t>Estudiantes con matrícula vigente en el año (entre su ingreso y su última matrícula en Cóndor). Fuente: Cóndor y bases de datos MCIC. Un estudiante cuenta una vez por año; el énfasis es el de su plan de ingreso.</a:t>
-            </a:r>
-          </a:p>
-        </p:txBody>
-      </p:sp>
-    </p:spTree>
-    <p:extLst>
-      <p:ext uri="{BB962C8B-B14F-4D97-AF65-F5344CB8AC3E}">
-        <p14:creationId xmlns:p14="http://schemas.microsoft.com/office/powerpoint/2010/main" val="1220944027"/>
-      </p:ext>
-    </p:extLst>
-  </p:cSld>
-  <p:clrMapOvr>
-    <a:masterClrMapping/>
-  </p:clrMapOvr>
-</p:sld>
-</file>
-
 <file path=ppt/slides/slide2.xml><?xml version="1.0" encoding="utf-8"?>
 <p:sld xmlns:a="http://schemas.openxmlformats.org/drawingml/2006/main" xmlns:r="http://schemas.openxmlformats.org/officeDocument/2006/relationships" xmlns:p="http://schemas.openxmlformats.org/presentationml/2006/main">
   <p:cSld>

--- a/NuevaData/Presentacion/Profundizacion/FACTOR 12. RECURSOS FÍSICOS Y TECNOLÓGICOS/c. Socialización con la comunidad académica de acciones y avances/Laboratorios Maestría - MIC.pptx
+++ b/NuevaData/Presentacion/Profundizacion/FACTOR 12. RECURSOS FÍSICOS Y TECNOLÓGICOS/c. Socialización con la comunidad académica de acciones y avances/Laboratorios Maestría - MIC.pptx
@@ -20,6 +20,7 @@
     <p:sldId id="299" r:id="rId11"/>
     <p:sldId id="302" r:id="rId12"/>
     <p:sldId id="304" r:id="rId13"/>
+    <p:sldId id="305" r:id="rId14"/>
   </p:sldIdLst>
   <p:sldSz cx="12192000" cy="6858000"/>
   <p:notesSz cx="6858000" cy="9144000"/>
@@ -7439,6 +7440,1120 @@
 </p:sld>
 </file>
 
+<file path=ppt/slides/slide13.xml><?xml version="1.0" encoding="utf-8"?>
+<p:sld xmlns:a="http://schemas.openxmlformats.org/drawingml/2006/main" xmlns:r="http://schemas.openxmlformats.org/officeDocument/2006/relationships" xmlns:p="http://schemas.openxmlformats.org/presentationml/2006/main">
+  <p:cSld>
+    <p:spTree>
+      <p:nvGrpSpPr>
+        <p:cNvPr id="1" name="">
+          <a:extLst>
+            <a:ext uri="{FF2B5EF4-FFF2-40B4-BE49-F238E27FC236}">
+              <a16:creationId xmlns:a16="http://schemas.microsoft.com/office/drawing/2014/main" id="{5D5ACE55-E515-07F0-7FE1-A5E1EA400F99}"/>
+            </a:ext>
+          </a:extLst>
+        </p:cNvPr>
+        <p:cNvGrpSpPr/>
+        <p:nvPr/>
+      </p:nvGrpSpPr>
+      <p:grpSpPr>
+        <a:xfrm>
+          <a:off x="0" y="0"/>
+          <a:ext cx="0" cy="0"/>
+          <a:chOff x="0" y="0"/>
+          <a:chExt cx="0" cy="0"/>
+        </a:xfrm>
+      </p:grpSpPr>
+      <p:pic>
+        <p:nvPicPr>
+          <p:cNvPr id="7" name="Imagen 6" descr="Texto, Carta&#10;&#10;El contenido generado por IA puede ser incorrecto.">
+            <a:extLst>
+              <a:ext uri="{FF2B5EF4-FFF2-40B4-BE49-F238E27FC236}">
+                <a16:creationId xmlns:a16="http://schemas.microsoft.com/office/drawing/2014/main" id="{2C82D979-69BD-00C4-7031-926F8FFC4558}"/>
+              </a:ext>
+            </a:extLst>
+          </p:cNvPr>
+          <p:cNvPicPr>
+            <a:picLocks noChangeAspect="1"/>
+          </p:cNvPicPr>
+          <p:nvPr/>
+        </p:nvPicPr>
+        <p:blipFill>
+          <a:blip r:embed="rId2">
+            <a:alphaModFix amt="43000"/>
+          </a:blip>
+          <a:stretch>
+            <a:fillRect/>
+          </a:stretch>
+        </p:blipFill>
+        <p:spPr>
+          <a:xfrm>
+            <a:off x="8464671" y="5359161"/>
+            <a:ext cx="2940528" cy="1283719"/>
+          </a:xfrm>
+          <a:prstGeom prst="rect">
+            <a:avLst/>
+          </a:prstGeom>
+        </p:spPr>
+      </p:pic>
+      <p:pic>
+        <p:nvPicPr>
+          <p:cNvPr id="8" name="Imagen 7" descr="Francisco Jose De Caldas Ingeniería">
+            <a:extLst>
+              <a:ext uri="{FF2B5EF4-FFF2-40B4-BE49-F238E27FC236}">
+                <a16:creationId xmlns:a16="http://schemas.microsoft.com/office/drawing/2014/main" id="{EB85D378-946A-2353-9F9E-A1C8D0219C41}"/>
+              </a:ext>
+            </a:extLst>
+          </p:cNvPr>
+          <p:cNvPicPr>
+            <a:picLocks noChangeAspect="1"/>
+          </p:cNvPicPr>
+          <p:nvPr/>
+        </p:nvPicPr>
+        <p:blipFill>
+          <a:blip r:embed="rId3">
+            <a:alphaModFix amt="30000"/>
+          </a:blip>
+          <a:stretch>
+            <a:fillRect/>
+          </a:stretch>
+        </p:blipFill>
+        <p:spPr>
+          <a:xfrm>
+            <a:off x="9887130" y="484337"/>
+            <a:ext cx="1518967" cy="1600558"/>
+          </a:xfrm>
+          <a:prstGeom prst="rect">
+            <a:avLst/>
+          </a:prstGeom>
+        </p:spPr>
+      </p:pic>
+      <p:pic>
+        <p:nvPicPr>
+          <p:cNvPr id="9" name="Imagen 8" descr="Imagen que contiene botella, firmar, naranja, parada&#10;&#10;El contenido generado por inteligencia artificial puede ser incorrecto.">
+            <a:extLst>
+              <a:ext uri="{FF2B5EF4-FFF2-40B4-BE49-F238E27FC236}">
+                <a16:creationId xmlns:a16="http://schemas.microsoft.com/office/drawing/2014/main" id="{A345DA37-80DA-60A7-2EB4-D84F194F1EC2}"/>
+              </a:ext>
+            </a:extLst>
+          </p:cNvPr>
+          <p:cNvPicPr>
+            <a:picLocks noChangeAspect="1"/>
+          </p:cNvPicPr>
+          <p:nvPr/>
+        </p:nvPicPr>
+        <p:blipFill>
+          <a:blip r:embed="rId4">
+            <a:alphaModFix amt="22000"/>
+          </a:blip>
+          <a:srcRect r="9662" b="1667"/>
+          <a:stretch>
+            <a:fillRect/>
+          </a:stretch>
+        </p:blipFill>
+        <p:spPr>
+          <a:xfrm>
+            <a:off x="785362" y="5486761"/>
+            <a:ext cx="3627803" cy="1159264"/>
+          </a:xfrm>
+          <a:prstGeom prst="rect">
+            <a:avLst/>
+          </a:prstGeom>
+        </p:spPr>
+      </p:pic>
+      <p:sp>
+        <p:nvSpPr>
+          <p:cNvPr id="22" name="Título 1">
+            <a:extLst>
+              <a:ext uri="{FF2B5EF4-FFF2-40B4-BE49-F238E27FC236}">
+                <a16:creationId xmlns:a16="http://schemas.microsoft.com/office/drawing/2014/main" id="{467CED5E-CCF6-DC72-069C-4341D6AAEB75}"/>
+              </a:ext>
+            </a:extLst>
+          </p:cNvPr>
+          <p:cNvSpPr>
+            <a:spLocks noGrp="1"/>
+          </p:cNvSpPr>
+          <p:nvPr/>
+        </p:nvSpPr>
+        <p:spPr>
+          <a:xfrm>
+            <a:off x="783293" y="471388"/>
+            <a:ext cx="7128670" cy="815723"/>
+          </a:xfrm>
+          <a:prstGeom prst="rect">
+            <a:avLst/>
+          </a:prstGeom>
+        </p:spPr>
+        <p:txBody>
+          <a:bodyPr vert="horz" lIns="91440" tIns="45720" rIns="91440" bIns="45720" rtlCol="0" anchor="ctr">
+            <a:noAutofit/>
+          </a:bodyPr>
+          <a:lstStyle>
+            <a:lvl1pPr algn="l" defTabSz="514338" rtl="0" eaLnBrk="1" latinLnBrk="0" hangingPunct="1">
+              <a:lnSpc>
+                <a:spcPct val="90000"/>
+              </a:lnSpc>
+              <a:spcBef>
+                <a:spcPct val="0"/>
+              </a:spcBef>
+              <a:buNone/>
+              <a:defRPr sz="2025" b="1" kern="1200">
+                <a:solidFill>
+                  <a:schemeClr val="tx1"/>
+                </a:solidFill>
+                <a:latin typeface="+mj-lt"/>
+                <a:ea typeface="+mj-ea"/>
+                <a:cs typeface="+mj-cs"/>
+              </a:defRPr>
+            </a:lvl1pPr>
+          </a:lstStyle>
+          <a:p>
+            <a:r>
+              <a:rPr lang="es-CO" sz="4000">
+                <a:latin typeface="Segoe UI"/>
+                <a:cs typeface="Segoe UI"/>
+              </a:rPr>
+              <a:t> Estudiantes Impactados </a:t>
+            </a:r>
+          </a:p>
+        </p:txBody>
+      </p:sp>
+      <p:sp>
+        <p:nvSpPr>
+          <p:cNvPr id="23" name="Estudiantes activos - subtítulo"/>
+          <p:cNvSpPr txBox="1"/>
+          <p:nvPr/>
+        </p:nvSpPr>
+        <p:spPr>
+          <a:xfrm>
+            <a:off x="783293" y="1300000"/>
+            <a:ext cx="8900000" cy="420000"/>
+          </a:xfrm>
+          <a:prstGeom prst="rect">
+            <a:avLst/>
+          </a:prstGeom>
+          <a:noFill/>
+        </p:spPr>
+        <p:txBody>
+          <a:bodyPr wrap="none">
+            <a:spAutoFit/>
+          </a:bodyPr>
+          <a:lstStyle/>
+          <a:p>
+            <a:r>
+              <a:rPr sz="1800" b="1">
+                <a:latin typeface="Segoe UI"/>
+              </a:rPr>
+              <a:t>Estudiantes activos 2022 a 2026 — modalidad Profundización: 164 estudiantes distintos</a:t>
+            </a:r>
+          </a:p>
+        </p:txBody>
+      </p:sp>
+      <p:graphicFrame>
+        <p:nvGraphicFramePr>
+          <p:cNvPr id="24" name="Estudiantes activos - tabla"/>
+          <p:cNvGraphicFramePr>
+            <a:graphicFrameLocks noGrp="1"/>
+          </p:cNvGraphicFramePr>
+          <p:nvPr/>
+        </p:nvGraphicFramePr>
+        <p:xfrm>
+          <a:off x="785362" y="1780000"/>
+          <a:ext cx="8900000" cy="2720000"/>
+        </p:xfrm>
+        <a:graphic>
+          <a:graphicData uri="http://schemas.openxmlformats.org/drawingml/2006/table">
+            <a:tbl>
+              <a:tblPr firstRow="1" bandRow="1">
+                <a:tableStyleId>{5940675A-B579-460E-94D1-54222C63F5DA}</a:tableStyleId>
+              </a:tblPr>
+              <a:tblGrid>
+                <a:gridCol w="3900000"/>
+                <a:gridCol w="1000000"/>
+                <a:gridCol w="1000000"/>
+                <a:gridCol w="1000000"/>
+                <a:gridCol w="1000000"/>
+                <a:gridCol w="1000000"/>
+              </a:tblGrid>
+              <a:tr h="340000">
+                <a:tc>
+                  <a:txBody>
+                    <a:bodyPr/>
+                    <a:lstStyle/>
+                    <a:p>
+                      <a:pPr algn="l"/>
+                      <a:r>
+                        <a:rPr sz="1400" b="1">
+                          <a:latin typeface="Segoe UI"/>
+                        </a:rPr>
+                        <a:t>Énfasis</a:t>
+                      </a:r>
+                    </a:p>
+                  </a:txBody>
+                  <a:tcPr anchor="ctr" marL="70000" marR="70000">
+                    <a:solidFill>
+                      <a:srgbClr val="DCE6F1"/>
+                    </a:solidFill>
+                  </a:tcPr>
+                </a:tc>
+                <a:tc>
+                  <a:txBody>
+                    <a:bodyPr/>
+                    <a:lstStyle/>
+                    <a:p>
+                      <a:pPr algn="ctr"/>
+                      <a:r>
+                        <a:rPr sz="1400" b="1">
+                          <a:latin typeface="Segoe UI"/>
+                        </a:rPr>
+                        <a:t>2022</a:t>
+                      </a:r>
+                    </a:p>
+                  </a:txBody>
+                  <a:tcPr anchor="ctr" marL="70000" marR="70000">
+                    <a:solidFill>
+                      <a:srgbClr val="DCE6F1"/>
+                    </a:solidFill>
+                  </a:tcPr>
+                </a:tc>
+                <a:tc>
+                  <a:txBody>
+                    <a:bodyPr/>
+                    <a:lstStyle/>
+                    <a:p>
+                      <a:pPr algn="ctr"/>
+                      <a:r>
+                        <a:rPr sz="1400" b="1">
+                          <a:latin typeface="Segoe UI"/>
+                        </a:rPr>
+                        <a:t>2023</a:t>
+                      </a:r>
+                    </a:p>
+                  </a:txBody>
+                  <a:tcPr anchor="ctr" marL="70000" marR="70000">
+                    <a:solidFill>
+                      <a:srgbClr val="DCE6F1"/>
+                    </a:solidFill>
+                  </a:tcPr>
+                </a:tc>
+                <a:tc>
+                  <a:txBody>
+                    <a:bodyPr/>
+                    <a:lstStyle/>
+                    <a:p>
+                      <a:pPr algn="ctr"/>
+                      <a:r>
+                        <a:rPr sz="1400" b="1">
+                          <a:latin typeface="Segoe UI"/>
+                        </a:rPr>
+                        <a:t>2024</a:t>
+                      </a:r>
+                    </a:p>
+                  </a:txBody>
+                  <a:tcPr anchor="ctr" marL="70000" marR="70000">
+                    <a:solidFill>
+                      <a:srgbClr val="DCE6F1"/>
+                    </a:solidFill>
+                  </a:tcPr>
+                </a:tc>
+                <a:tc>
+                  <a:txBody>
+                    <a:bodyPr/>
+                    <a:lstStyle/>
+                    <a:p>
+                      <a:pPr algn="ctr"/>
+                      <a:r>
+                        <a:rPr sz="1400" b="1">
+                          <a:latin typeface="Segoe UI"/>
+                        </a:rPr>
+                        <a:t>2025</a:t>
+                      </a:r>
+                    </a:p>
+                  </a:txBody>
+                  <a:tcPr anchor="ctr" marL="70000" marR="70000">
+                    <a:solidFill>
+                      <a:srgbClr val="DCE6F1"/>
+                    </a:solidFill>
+                  </a:tcPr>
+                </a:tc>
+                <a:tc>
+                  <a:txBody>
+                    <a:bodyPr/>
+                    <a:lstStyle/>
+                    <a:p>
+                      <a:pPr algn="ctr"/>
+                      <a:r>
+                        <a:rPr sz="1400" b="1">
+                          <a:latin typeface="Segoe UI"/>
+                        </a:rPr>
+                        <a:t>2026</a:t>
+                      </a:r>
+                    </a:p>
+                  </a:txBody>
+                  <a:tcPr anchor="ctr" marL="70000" marR="70000">
+                    <a:solidFill>
+                      <a:srgbClr val="DCE6F1"/>
+                    </a:solidFill>
+                  </a:tcPr>
+                </a:tc>
+              </a:tr>
+              <a:tr h="340000">
+                <a:tc>
+                  <a:txBody>
+                    <a:bodyPr/>
+                    <a:lstStyle/>
+                    <a:p>
+                      <a:pPr algn="l"/>
+                      <a:r>
+                        <a:rPr sz="1400" b="0">
+                          <a:latin typeface="Segoe UI"/>
+                        </a:rPr>
+                        <a:t>Teleinformática</a:t>
+                      </a:r>
+                    </a:p>
+                  </a:txBody>
+                  <a:tcPr anchor="ctr" marL="70000" marR="70000"/>
+                </a:tc>
+                <a:tc>
+                  <a:txBody>
+                    <a:bodyPr/>
+                    <a:lstStyle/>
+                    <a:p>
+                      <a:pPr algn="ctr"/>
+                      <a:r>
+                        <a:rPr sz="1400" b="0">
+                          <a:latin typeface="Segoe UI"/>
+                        </a:rPr>
+                        <a:t>23</a:t>
+                      </a:r>
+                    </a:p>
+                  </a:txBody>
+                  <a:tcPr anchor="ctr" marL="70000" marR="70000"/>
+                </a:tc>
+                <a:tc>
+                  <a:txBody>
+                    <a:bodyPr/>
+                    <a:lstStyle/>
+                    <a:p>
+                      <a:pPr algn="ctr"/>
+                      <a:r>
+                        <a:rPr sz="1400" b="0">
+                          <a:latin typeface="Segoe UI"/>
+                        </a:rPr>
+                        <a:t>16</a:t>
+                      </a:r>
+                    </a:p>
+                  </a:txBody>
+                  <a:tcPr anchor="ctr" marL="70000" marR="70000"/>
+                </a:tc>
+                <a:tc>
+                  <a:txBody>
+                    <a:bodyPr/>
+                    <a:lstStyle/>
+                    <a:p>
+                      <a:pPr algn="ctr"/>
+                      <a:r>
+                        <a:rPr sz="1400" b="0">
+                          <a:latin typeface="Segoe UI"/>
+                        </a:rPr>
+                        <a:t>16</a:t>
+                      </a:r>
+                    </a:p>
+                  </a:txBody>
+                  <a:tcPr anchor="ctr" marL="70000" marR="70000"/>
+                </a:tc>
+                <a:tc>
+                  <a:txBody>
+                    <a:bodyPr/>
+                    <a:lstStyle/>
+                    <a:p>
+                      <a:pPr algn="ctr"/>
+                      <a:r>
+                        <a:rPr sz="1400" b="0">
+                          <a:latin typeface="Segoe UI"/>
+                        </a:rPr>
+                        <a:t>14</a:t>
+                      </a:r>
+                    </a:p>
+                  </a:txBody>
+                  <a:tcPr anchor="ctr" marL="70000" marR="70000"/>
+                </a:tc>
+                <a:tc>
+                  <a:txBody>
+                    <a:bodyPr/>
+                    <a:lstStyle/>
+                    <a:p>
+                      <a:pPr algn="ctr"/>
+                      <a:r>
+                        <a:rPr sz="1400" b="0">
+                          <a:latin typeface="Segoe UI"/>
+                        </a:rPr>
+                        <a:t>11</a:t>
+                      </a:r>
+                    </a:p>
+                  </a:txBody>
+                  <a:tcPr anchor="ctr" marL="70000" marR="70000"/>
+                </a:tc>
+              </a:tr>
+              <a:tr h="340000">
+                <a:tc>
+                  <a:txBody>
+                    <a:bodyPr/>
+                    <a:lstStyle/>
+                    <a:p>
+                      <a:pPr algn="l"/>
+                      <a:r>
+                        <a:rPr sz="1400" b="0">
+                          <a:latin typeface="Segoe UI"/>
+                        </a:rPr>
+                        <a:t>Sistemas de Información</a:t>
+                      </a:r>
+                    </a:p>
+                  </a:txBody>
+                  <a:tcPr anchor="ctr" marL="70000" marR="70000"/>
+                </a:tc>
+                <a:tc>
+                  <a:txBody>
+                    <a:bodyPr/>
+                    <a:lstStyle/>
+                    <a:p>
+                      <a:pPr algn="ctr"/>
+                      <a:r>
+                        <a:rPr sz="1400" b="0">
+                          <a:latin typeface="Segoe UI"/>
+                        </a:rPr>
+                        <a:t>5</a:t>
+                      </a:r>
+                    </a:p>
+                  </a:txBody>
+                  <a:tcPr anchor="ctr" marL="70000" marR="70000"/>
+                </a:tc>
+                <a:tc>
+                  <a:txBody>
+                    <a:bodyPr/>
+                    <a:lstStyle/>
+                    <a:p>
+                      <a:pPr algn="ctr"/>
+                      <a:r>
+                        <a:rPr sz="1400" b="0">
+                          <a:latin typeface="Segoe UI"/>
+                        </a:rPr>
+                        <a:t>4</a:t>
+                      </a:r>
+                    </a:p>
+                  </a:txBody>
+                  <a:tcPr anchor="ctr" marL="70000" marR="70000"/>
+                </a:tc>
+                <a:tc>
+                  <a:txBody>
+                    <a:bodyPr/>
+                    <a:lstStyle/>
+                    <a:p>
+                      <a:pPr algn="ctr"/>
+                      <a:r>
+                        <a:rPr sz="1400" b="0">
+                          <a:latin typeface="Segoe UI"/>
+                        </a:rPr>
+                        <a:t>2</a:t>
+                      </a:r>
+                    </a:p>
+                  </a:txBody>
+                  <a:tcPr anchor="ctr" marL="70000" marR="70000"/>
+                </a:tc>
+                <a:tc>
+                  <a:txBody>
+                    <a:bodyPr/>
+                    <a:lstStyle/>
+                    <a:p>
+                      <a:pPr algn="ctr"/>
+                      <a:r>
+                        <a:rPr sz="1400" b="0">
+                          <a:latin typeface="Segoe UI"/>
+                        </a:rPr>
+                        <a:t>2</a:t>
+                      </a:r>
+                    </a:p>
+                  </a:txBody>
+                  <a:tcPr anchor="ctr" marL="70000" marR="70000"/>
+                </a:tc>
+                <a:tc>
+                  <a:txBody>
+                    <a:bodyPr/>
+                    <a:lstStyle/>
+                    <a:p>
+                      <a:pPr algn="ctr"/>
+                      <a:r>
+                        <a:rPr sz="1400" b="0">
+                          <a:latin typeface="Segoe UI"/>
+                        </a:rPr>
+                        <a:t>2</a:t>
+                      </a:r>
+                    </a:p>
+                  </a:txBody>
+                  <a:tcPr anchor="ctr" marL="70000" marR="70000"/>
+                </a:tc>
+              </a:tr>
+              <a:tr h="340000">
+                <a:tc>
+                  <a:txBody>
+                    <a:bodyPr/>
+                    <a:lstStyle/>
+                    <a:p>
+                      <a:pPr algn="l"/>
+                      <a:r>
+                        <a:rPr sz="1400" b="0">
+                          <a:latin typeface="Segoe UI"/>
+                        </a:rPr>
+                        <a:t>Geomática</a:t>
+                      </a:r>
+                    </a:p>
+                  </a:txBody>
+                  <a:tcPr anchor="ctr" marL="70000" marR="70000"/>
+                </a:tc>
+                <a:tc>
+                  <a:txBody>
+                    <a:bodyPr/>
+                    <a:lstStyle/>
+                    <a:p>
+                      <a:pPr algn="ctr"/>
+                      <a:r>
+                        <a:rPr sz="1400" b="0">
+                          <a:latin typeface="Segoe UI"/>
+                        </a:rPr>
+                        <a:t>27</a:t>
+                      </a:r>
+                    </a:p>
+                  </a:txBody>
+                  <a:tcPr anchor="ctr" marL="70000" marR="70000"/>
+                </a:tc>
+                <a:tc>
+                  <a:txBody>
+                    <a:bodyPr/>
+                    <a:lstStyle/>
+                    <a:p>
+                      <a:pPr algn="ctr"/>
+                      <a:r>
+                        <a:rPr sz="1400" b="0">
+                          <a:latin typeface="Segoe UI"/>
+                        </a:rPr>
+                        <a:t>24</a:t>
+                      </a:r>
+                    </a:p>
+                  </a:txBody>
+                  <a:tcPr anchor="ctr" marL="70000" marR="70000"/>
+                </a:tc>
+                <a:tc>
+                  <a:txBody>
+                    <a:bodyPr/>
+                    <a:lstStyle/>
+                    <a:p>
+                      <a:pPr algn="ctr"/>
+                      <a:r>
+                        <a:rPr sz="1400" b="0">
+                          <a:latin typeface="Segoe UI"/>
+                        </a:rPr>
+                        <a:t>30</a:t>
+                      </a:r>
+                    </a:p>
+                  </a:txBody>
+                  <a:tcPr anchor="ctr" marL="70000" marR="70000"/>
+                </a:tc>
+                <a:tc>
+                  <a:txBody>
+                    <a:bodyPr/>
+                    <a:lstStyle/>
+                    <a:p>
+                      <a:pPr algn="ctr"/>
+                      <a:r>
+                        <a:rPr sz="1400" b="0">
+                          <a:latin typeface="Segoe UI"/>
+                        </a:rPr>
+                        <a:t>33</a:t>
+                      </a:r>
+                    </a:p>
+                  </a:txBody>
+                  <a:tcPr anchor="ctr" marL="70000" marR="70000"/>
+                </a:tc>
+                <a:tc>
+                  <a:txBody>
+                    <a:bodyPr/>
+                    <a:lstStyle/>
+                    <a:p>
+                      <a:pPr algn="ctr"/>
+                      <a:r>
+                        <a:rPr sz="1400" b="0">
+                          <a:latin typeface="Segoe UI"/>
+                        </a:rPr>
+                        <a:t>31</a:t>
+                      </a:r>
+                    </a:p>
+                  </a:txBody>
+                  <a:tcPr anchor="ctr" marL="70000" marR="70000"/>
+                </a:tc>
+              </a:tr>
+              <a:tr h="340000">
+                <a:tc>
+                  <a:txBody>
+                    <a:bodyPr/>
+                    <a:lstStyle/>
+                    <a:p>
+                      <a:pPr algn="l"/>
+                      <a:r>
+                        <a:rPr sz="1400" b="0">
+                          <a:latin typeface="Segoe UI"/>
+                        </a:rPr>
+                        <a:t>Ingeniería de Software</a:t>
+                      </a:r>
+                    </a:p>
+                  </a:txBody>
+                  <a:tcPr anchor="ctr" marL="70000" marR="70000"/>
+                </a:tc>
+                <a:tc>
+                  <a:txBody>
+                    <a:bodyPr/>
+                    <a:lstStyle/>
+                    <a:p>
+                      <a:pPr algn="ctr"/>
+                      <a:r>
+                        <a:rPr sz="1400" b="0">
+                          <a:latin typeface="Segoe UI"/>
+                        </a:rPr>
+                        <a:t>47</a:t>
+                      </a:r>
+                    </a:p>
+                  </a:txBody>
+                  <a:tcPr anchor="ctr" marL="70000" marR="70000"/>
+                </a:tc>
+                <a:tc>
+                  <a:txBody>
+                    <a:bodyPr/>
+                    <a:lstStyle/>
+                    <a:p>
+                      <a:pPr algn="ctr"/>
+                      <a:r>
+                        <a:rPr sz="1400" b="0">
+                          <a:latin typeface="Segoe UI"/>
+                        </a:rPr>
+                        <a:t>45</a:t>
+                      </a:r>
+                    </a:p>
+                  </a:txBody>
+                  <a:tcPr anchor="ctr" marL="70000" marR="70000"/>
+                </a:tc>
+                <a:tc>
+                  <a:txBody>
+                    <a:bodyPr/>
+                    <a:lstStyle/>
+                    <a:p>
+                      <a:pPr algn="ctr"/>
+                      <a:r>
+                        <a:rPr sz="1400" b="0">
+                          <a:latin typeface="Segoe UI"/>
+                        </a:rPr>
+                        <a:t>38</a:t>
+                      </a:r>
+                    </a:p>
+                  </a:txBody>
+                  <a:tcPr anchor="ctr" marL="70000" marR="70000"/>
+                </a:tc>
+                <a:tc>
+                  <a:txBody>
+                    <a:bodyPr/>
+                    <a:lstStyle/>
+                    <a:p>
+                      <a:pPr algn="ctr"/>
+                      <a:r>
+                        <a:rPr sz="1400" b="0">
+                          <a:latin typeface="Segoe UI"/>
+                        </a:rPr>
+                        <a:t>36</a:t>
+                      </a:r>
+                    </a:p>
+                  </a:txBody>
+                  <a:tcPr anchor="ctr" marL="70000" marR="70000"/>
+                </a:tc>
+                <a:tc>
+                  <a:txBody>
+                    <a:bodyPr/>
+                    <a:lstStyle/>
+                    <a:p>
+                      <a:pPr algn="ctr"/>
+                      <a:r>
+                        <a:rPr sz="1400" b="0">
+                          <a:latin typeface="Segoe UI"/>
+                        </a:rPr>
+                        <a:t>26</a:t>
+                      </a:r>
+                    </a:p>
+                  </a:txBody>
+                  <a:tcPr anchor="ctr" marL="70000" marR="70000"/>
+                </a:tc>
+              </a:tr>
+              <a:tr h="340000">
+                <a:tc>
+                  <a:txBody>
+                    <a:bodyPr/>
+                    <a:lstStyle/>
+                    <a:p>
+                      <a:pPr algn="l"/>
+                      <a:r>
+                        <a:rPr sz="1400" b="0">
+                          <a:latin typeface="Segoe UI"/>
+                        </a:rPr>
+                        <a:t>Inteligencia Artificial</a:t>
+                      </a:r>
+                    </a:p>
+                  </a:txBody>
+                  <a:tcPr anchor="ctr" marL="70000" marR="70000"/>
+                </a:tc>
+                <a:tc>
+                  <a:txBody>
+                    <a:bodyPr/>
+                    <a:lstStyle/>
+                    <a:p>
+                      <a:pPr algn="ctr"/>
+                      <a:r>
+                        <a:rPr sz="1400" b="0">
+                          <a:latin typeface="Segoe UI"/>
+                        </a:rPr>
+                        <a:t>0</a:t>
+                      </a:r>
+                    </a:p>
+                  </a:txBody>
+                  <a:tcPr anchor="ctr" marL="70000" marR="70000"/>
+                </a:tc>
+                <a:tc>
+                  <a:txBody>
+                    <a:bodyPr/>
+                    <a:lstStyle/>
+                    <a:p>
+                      <a:pPr algn="ctr"/>
+                      <a:r>
+                        <a:rPr sz="1400" b="0">
+                          <a:latin typeface="Segoe UI"/>
+                        </a:rPr>
+                        <a:t>0</a:t>
+                      </a:r>
+                    </a:p>
+                  </a:txBody>
+                  <a:tcPr anchor="ctr" marL="70000" marR="70000"/>
+                </a:tc>
+                <a:tc>
+                  <a:txBody>
+                    <a:bodyPr/>
+                    <a:lstStyle/>
+                    <a:p>
+                      <a:pPr algn="ctr"/>
+                      <a:r>
+                        <a:rPr sz="1400" b="0">
+                          <a:latin typeface="Segoe UI"/>
+                        </a:rPr>
+                        <a:t>1</a:t>
+                      </a:r>
+                    </a:p>
+                  </a:txBody>
+                  <a:tcPr anchor="ctr" marL="70000" marR="70000"/>
+                </a:tc>
+                <a:tc>
+                  <a:txBody>
+                    <a:bodyPr/>
+                    <a:lstStyle/>
+                    <a:p>
+                      <a:pPr algn="ctr"/>
+                      <a:r>
+                        <a:rPr sz="1400" b="0">
+                          <a:latin typeface="Segoe UI"/>
+                        </a:rPr>
+                        <a:t>9</a:t>
+                      </a:r>
+                    </a:p>
+                  </a:txBody>
+                  <a:tcPr anchor="ctr" marL="70000" marR="70000"/>
+                </a:tc>
+                <a:tc>
+                  <a:txBody>
+                    <a:bodyPr/>
+                    <a:lstStyle/>
+                    <a:p>
+                      <a:pPr algn="ctr"/>
+                      <a:r>
+                        <a:rPr sz="1400" b="0">
+                          <a:latin typeface="Segoe UI"/>
+                        </a:rPr>
+                        <a:t>12</a:t>
+                      </a:r>
+                    </a:p>
+                  </a:txBody>
+                  <a:tcPr anchor="ctr" marL="70000" marR="70000"/>
+                </a:tc>
+              </a:tr>
+              <a:tr h="340000">
+                <a:tc>
+                  <a:txBody>
+                    <a:bodyPr/>
+                    <a:lstStyle/>
+                    <a:p>
+                      <a:pPr algn="l"/>
+                      <a:r>
+                        <a:rPr sz="1400" b="0">
+                          <a:latin typeface="Segoe UI"/>
+                        </a:rPr>
+                        <a:t>Sin énfasis definido aún</a:t>
+                      </a:r>
+                    </a:p>
+                  </a:txBody>
+                  <a:tcPr anchor="ctr" marL="70000" marR="70000"/>
+                </a:tc>
+                <a:tc>
+                  <a:txBody>
+                    <a:bodyPr/>
+                    <a:lstStyle/>
+                    <a:p>
+                      <a:pPr algn="ctr"/>
+                      <a:r>
+                        <a:rPr sz="1400" b="0">
+                          <a:latin typeface="Segoe UI"/>
+                        </a:rPr>
+                        <a:t>0</a:t>
+                      </a:r>
+                    </a:p>
+                  </a:txBody>
+                  <a:tcPr anchor="ctr" marL="70000" marR="70000"/>
+                </a:tc>
+                <a:tc>
+                  <a:txBody>
+                    <a:bodyPr/>
+                    <a:lstStyle/>
+                    <a:p>
+                      <a:pPr algn="ctr"/>
+                      <a:r>
+                        <a:rPr sz="1400" b="0">
+                          <a:latin typeface="Segoe UI"/>
+                        </a:rPr>
+                        <a:t>0</a:t>
+                      </a:r>
+                    </a:p>
+                  </a:txBody>
+                  <a:tcPr anchor="ctr" marL="70000" marR="70000"/>
+                </a:tc>
+                <a:tc>
+                  <a:txBody>
+                    <a:bodyPr/>
+                    <a:lstStyle/>
+                    <a:p>
+                      <a:pPr algn="ctr"/>
+                      <a:r>
+                        <a:rPr sz="1400" b="0">
+                          <a:latin typeface="Segoe UI"/>
+                        </a:rPr>
+                        <a:t>1</a:t>
+                      </a:r>
+                    </a:p>
+                  </a:txBody>
+                  <a:tcPr anchor="ctr" marL="70000" marR="70000"/>
+                </a:tc>
+                <a:tc>
+                  <a:txBody>
+                    <a:bodyPr/>
+                    <a:lstStyle/>
+                    <a:p>
+                      <a:pPr algn="ctr"/>
+                      <a:r>
+                        <a:rPr sz="1400" b="0">
+                          <a:latin typeface="Segoe UI"/>
+                        </a:rPr>
+                        <a:t>1</a:t>
+                      </a:r>
+                    </a:p>
+                  </a:txBody>
+                  <a:tcPr anchor="ctr" marL="70000" marR="70000"/>
+                </a:tc>
+                <a:tc>
+                  <a:txBody>
+                    <a:bodyPr/>
+                    <a:lstStyle/>
+                    <a:p>
+                      <a:pPr algn="ctr"/>
+                      <a:r>
+                        <a:rPr sz="1400" b="0">
+                          <a:latin typeface="Segoe UI"/>
+                        </a:rPr>
+                        <a:t>10</a:t>
+                      </a:r>
+                    </a:p>
+                  </a:txBody>
+                  <a:tcPr anchor="ctr" marL="70000" marR="70000"/>
+                </a:tc>
+              </a:tr>
+              <a:tr h="340000">
+                <a:tc>
+                  <a:txBody>
+                    <a:bodyPr/>
+                    <a:lstStyle/>
+                    <a:p>
+                      <a:pPr algn="l"/>
+                      <a:r>
+                        <a:rPr sz="1400" b="1">
+                          <a:latin typeface="Segoe UI"/>
+                        </a:rPr>
+                        <a:t>Total Profundización</a:t>
+                      </a:r>
+                    </a:p>
+                  </a:txBody>
+                  <a:tcPr anchor="ctr" marL="70000" marR="70000">
+                    <a:solidFill>
+                      <a:srgbClr val="DCE6F1"/>
+                    </a:solidFill>
+                  </a:tcPr>
+                </a:tc>
+                <a:tc>
+                  <a:txBody>
+                    <a:bodyPr/>
+                    <a:lstStyle/>
+                    <a:p>
+                      <a:pPr algn="ctr"/>
+                      <a:r>
+                        <a:rPr sz="1400" b="1">
+                          <a:latin typeface="Segoe UI"/>
+                        </a:rPr>
+                        <a:t>102</a:t>
+                      </a:r>
+                    </a:p>
+                  </a:txBody>
+                  <a:tcPr anchor="ctr" marL="70000" marR="70000">
+                    <a:solidFill>
+                      <a:srgbClr val="DCE6F1"/>
+                    </a:solidFill>
+                  </a:tcPr>
+                </a:tc>
+                <a:tc>
+                  <a:txBody>
+                    <a:bodyPr/>
+                    <a:lstStyle/>
+                    <a:p>
+                      <a:pPr algn="ctr"/>
+                      <a:r>
+                        <a:rPr sz="1400" b="1">
+                          <a:latin typeface="Segoe UI"/>
+                        </a:rPr>
+                        <a:t>89</a:t>
+                      </a:r>
+                    </a:p>
+                  </a:txBody>
+                  <a:tcPr anchor="ctr" marL="70000" marR="70000">
+                    <a:solidFill>
+                      <a:srgbClr val="DCE6F1"/>
+                    </a:solidFill>
+                  </a:tcPr>
+                </a:tc>
+                <a:tc>
+                  <a:txBody>
+                    <a:bodyPr/>
+                    <a:lstStyle/>
+                    <a:p>
+                      <a:pPr algn="ctr"/>
+                      <a:r>
+                        <a:rPr sz="1400" b="1">
+                          <a:latin typeface="Segoe UI"/>
+                        </a:rPr>
+                        <a:t>88</a:t>
+                      </a:r>
+                    </a:p>
+                  </a:txBody>
+                  <a:tcPr anchor="ctr" marL="70000" marR="70000">
+                    <a:solidFill>
+                      <a:srgbClr val="DCE6F1"/>
+                    </a:solidFill>
+                  </a:tcPr>
+                </a:tc>
+                <a:tc>
+                  <a:txBody>
+                    <a:bodyPr/>
+                    <a:lstStyle/>
+                    <a:p>
+                      <a:pPr algn="ctr"/>
+                      <a:r>
+                        <a:rPr sz="1400" b="1">
+                          <a:latin typeface="Segoe UI"/>
+                        </a:rPr>
+                        <a:t>95</a:t>
+                      </a:r>
+                    </a:p>
+                  </a:txBody>
+                  <a:tcPr anchor="ctr" marL="70000" marR="70000">
+                    <a:solidFill>
+                      <a:srgbClr val="DCE6F1"/>
+                    </a:solidFill>
+                  </a:tcPr>
+                </a:tc>
+                <a:tc>
+                  <a:txBody>
+                    <a:bodyPr/>
+                    <a:lstStyle/>
+                    <a:p>
+                      <a:pPr algn="ctr"/>
+                      <a:r>
+                        <a:rPr sz="1400" b="1">
+                          <a:latin typeface="Segoe UI"/>
+                        </a:rPr>
+                        <a:t>92</a:t>
+                      </a:r>
+                    </a:p>
+                  </a:txBody>
+                  <a:tcPr anchor="ctr" marL="70000" marR="70000">
+                    <a:solidFill>
+                      <a:srgbClr val="DCE6F1"/>
+                    </a:solidFill>
+                  </a:tcPr>
+                </a:tc>
+              </a:tr>
+            </a:tbl>
+          </a:graphicData>
+        </a:graphic>
+      </p:graphicFrame>
+      <p:sp>
+        <p:nvSpPr>
+          <p:cNvPr id="25" name="Estudiantes activos - nota"/>
+          <p:cNvSpPr txBox="1"/>
+          <p:nvPr/>
+        </p:nvSpPr>
+        <p:spPr>
+          <a:xfrm>
+            <a:off x="785362" y="4550000"/>
+            <a:ext cx="8900000" cy="420000"/>
+          </a:xfrm>
+          <a:prstGeom prst="rect">
+            <a:avLst/>
+          </a:prstGeom>
+          <a:noFill/>
+        </p:spPr>
+        <p:txBody>
+          <a:bodyPr wrap="square">
+            <a:spAutoFit/>
+          </a:bodyPr>
+          <a:lstStyle/>
+          <a:p>
+            <a:r>
+              <a:rPr sz="900" i="1">
+                <a:latin typeface="Segoe UI"/>
+              </a:rPr>
+              <a:t>Estudiantes con matrícula vigente en el año (entre su ingreso y su última matrícula en Cóndor). Fuente: Cóndor y bases de datos MCIC. Un estudiante cuenta una vez por año; el énfasis es el de su plan de ingreso.</a:t>
+            </a:r>
+          </a:p>
+        </p:txBody>
+      </p:sp>
+    </p:spTree>
+    <p:extLst>
+      <p:ext uri="{BB962C8B-B14F-4D97-AF65-F5344CB8AC3E}">
+        <p14:creationId xmlns:p14="http://schemas.microsoft.com/office/powerpoint/2010/main" val="1220944027"/>
+      </p:ext>
+    </p:extLst>
+  </p:cSld>
+  <p:clrMapOvr>
+    <a:masterClrMapping/>
+  </p:clrMapOvr>
+</p:sld>
+</file>
+
 <file path=ppt/slides/slide2.xml><?xml version="1.0" encoding="utf-8"?>
 <p:sld xmlns:a="http://schemas.openxmlformats.org/drawingml/2006/main" xmlns:r="http://schemas.openxmlformats.org/officeDocument/2006/relationships" xmlns:p="http://schemas.openxmlformats.org/presentationml/2006/main">
   <p:cSld>
